--- a/一顆謙卑的心.pptx
+++ b/一顆謙卑的心.pptx
@@ -309,7 +309,7 @@
             <a:fld id="{6749CD7E-C707-4067-A4FF-240A3A33EC32}" type="datetimeFigureOut">
               <a:rPr lang="zh-TW" altLang="en-US" smtClean="0"/>
               <a:pPr/>
-              <a:t>2023/8/26</a:t>
+              <a:t>2025/5/23</a:t>
             </a:fld>
             <a:endParaRPr lang="zh-TW" altLang="en-US"/>
           </a:p>
@@ -476,7 +476,7 @@
             <a:fld id="{6749CD7E-C707-4067-A4FF-240A3A33EC32}" type="datetimeFigureOut">
               <a:rPr lang="zh-TW" altLang="en-US" smtClean="0"/>
               <a:pPr/>
-              <a:t>2023/8/26</a:t>
+              <a:t>2025/5/23</a:t>
             </a:fld>
             <a:endParaRPr lang="zh-TW" altLang="en-US"/>
           </a:p>
@@ -653,7 +653,7 @@
             <a:fld id="{6749CD7E-C707-4067-A4FF-240A3A33EC32}" type="datetimeFigureOut">
               <a:rPr lang="zh-TW" altLang="en-US" smtClean="0"/>
               <a:pPr/>
-              <a:t>2023/8/26</a:t>
+              <a:t>2025/5/23</a:t>
             </a:fld>
             <a:endParaRPr lang="zh-TW" altLang="en-US"/>
           </a:p>
@@ -820,7 +820,7 @@
             <a:fld id="{6749CD7E-C707-4067-A4FF-240A3A33EC32}" type="datetimeFigureOut">
               <a:rPr lang="zh-TW" altLang="en-US" smtClean="0"/>
               <a:pPr/>
-              <a:t>2023/8/26</a:t>
+              <a:t>2025/5/23</a:t>
             </a:fld>
             <a:endParaRPr lang="zh-TW" altLang="en-US"/>
           </a:p>
@@ -1063,7 +1063,7 @@
             <a:fld id="{6749CD7E-C707-4067-A4FF-240A3A33EC32}" type="datetimeFigureOut">
               <a:rPr lang="zh-TW" altLang="en-US" smtClean="0"/>
               <a:pPr/>
-              <a:t>2023/8/26</a:t>
+              <a:t>2025/5/23</a:t>
             </a:fld>
             <a:endParaRPr lang="zh-TW" altLang="en-US"/>
           </a:p>
@@ -1348,7 +1348,7 @@
             <a:fld id="{6749CD7E-C707-4067-A4FF-240A3A33EC32}" type="datetimeFigureOut">
               <a:rPr lang="zh-TW" altLang="en-US" smtClean="0"/>
               <a:pPr/>
-              <a:t>2023/8/26</a:t>
+              <a:t>2025/5/23</a:t>
             </a:fld>
             <a:endParaRPr lang="zh-TW" altLang="en-US"/>
           </a:p>
@@ -1767,7 +1767,7 @@
             <a:fld id="{6749CD7E-C707-4067-A4FF-240A3A33EC32}" type="datetimeFigureOut">
               <a:rPr lang="zh-TW" altLang="en-US" smtClean="0"/>
               <a:pPr/>
-              <a:t>2023/8/26</a:t>
+              <a:t>2025/5/23</a:t>
             </a:fld>
             <a:endParaRPr lang="zh-TW" altLang="en-US"/>
           </a:p>
@@ -1882,7 +1882,7 @@
             <a:fld id="{6749CD7E-C707-4067-A4FF-240A3A33EC32}" type="datetimeFigureOut">
               <a:rPr lang="zh-TW" altLang="en-US" smtClean="0"/>
               <a:pPr/>
-              <a:t>2023/8/26</a:t>
+              <a:t>2025/5/23</a:t>
             </a:fld>
             <a:endParaRPr lang="zh-TW" altLang="en-US"/>
           </a:p>
@@ -1974,7 +1974,7 @@
             <a:fld id="{6749CD7E-C707-4067-A4FF-240A3A33EC32}" type="datetimeFigureOut">
               <a:rPr lang="zh-TW" altLang="en-US" smtClean="0"/>
               <a:pPr/>
-              <a:t>2023/8/26</a:t>
+              <a:t>2025/5/23</a:t>
             </a:fld>
             <a:endParaRPr lang="zh-TW" altLang="en-US"/>
           </a:p>
@@ -2248,7 +2248,7 @@
             <a:fld id="{6749CD7E-C707-4067-A4FF-240A3A33EC32}" type="datetimeFigureOut">
               <a:rPr lang="zh-TW" altLang="en-US" smtClean="0"/>
               <a:pPr/>
-              <a:t>2023/8/26</a:t>
+              <a:t>2025/5/23</a:t>
             </a:fld>
             <a:endParaRPr lang="zh-TW" altLang="en-US"/>
           </a:p>
@@ -2502,7 +2502,7 @@
             <a:fld id="{6749CD7E-C707-4067-A4FF-240A3A33EC32}" type="datetimeFigureOut">
               <a:rPr lang="zh-TW" altLang="en-US" smtClean="0"/>
               <a:pPr/>
-              <a:t>2023/8/26</a:t>
+              <a:t>2025/5/23</a:t>
             </a:fld>
             <a:endParaRPr lang="zh-TW" altLang="en-US"/>
           </a:p>
@@ -2717,7 +2717,7 @@
             <a:fld id="{6749CD7E-C707-4067-A4FF-240A3A33EC32}" type="datetimeFigureOut">
               <a:rPr lang="zh-TW" altLang="en-US" smtClean="0"/>
               <a:pPr/>
-              <a:t>2023/8/26</a:t>
+              <a:t>2025/5/23</a:t>
             </a:fld>
             <a:endParaRPr lang="zh-TW" altLang="en-US"/>
           </a:p>
@@ -3125,24 +3125,7 @@
                 <a:latin typeface="微軟正黑體" pitchFamily="34" charset="-120"/>
                 <a:ea typeface="微軟正黑體" pitchFamily="34" charset="-120"/>
               </a:rPr>
-              <a:t>一</a:t>
-            </a:r>
-            <a:r>
-              <a:rPr lang="zh-TW" altLang="en-US" sz="7200" b="1" i="1" dirty="0">
-                <a:solidFill>
-                  <a:srgbClr val="000066"/>
-                </a:solidFill>
-                <a:effectLst>
-                  <a:outerShdw blurRad="38100" dist="38100" dir="2700000" algn="tl">
-                    <a:srgbClr val="000000">
-                      <a:alpha val="43137"/>
-                    </a:srgbClr>
-                  </a:outerShdw>
-                </a:effectLst>
-                <a:latin typeface="微軟正黑體" pitchFamily="34" charset="-120"/>
-                <a:ea typeface="微軟正黑體" pitchFamily="34" charset="-120"/>
-              </a:rPr>
-              <a:t>顆謙卑的心</a:t>
+              <a:t>一顆謙卑的心</a:t>
             </a:r>
           </a:p>
         </p:txBody>
@@ -3278,24 +3261,34 @@
               <a:t>( </a:t>
             </a:r>
             <a:r>
-              <a:rPr lang="zh-CN" altLang="en-US" sz="3733" b="1" dirty="0">
+              <a:rPr lang="zh-CN" altLang="en-US" sz="3733" b="1" dirty="0" smtClean="0">
                 <a:solidFill>
                   <a:srgbClr val="000066"/>
                 </a:solidFill>
                 <a:latin typeface="Microsoft JhengHei" panose="020B0604030504040204" pitchFamily="34" charset="-120"/>
                 <a:ea typeface="Microsoft JhengHei" panose="020B0604030504040204" pitchFamily="34" charset="-120"/>
               </a:rPr>
-              <a:t>正</a:t>
-            </a:r>
-            <a:r>
-              <a:rPr lang="en-US" sz="3733" b="1" dirty="0">
+              <a:t>正歌</a:t>
+            </a:r>
+            <a:r>
+              <a:rPr lang="en-US" sz="3733" b="1" dirty="0" smtClean="0">
                 <a:solidFill>
                   <a:srgbClr val="000066"/>
                 </a:solidFill>
                 <a:latin typeface="Microsoft JhengHei" panose="020B0604030504040204" pitchFamily="34" charset="-120"/>
                 <a:ea typeface="Microsoft JhengHei" panose="020B0604030504040204" pitchFamily="34" charset="-120"/>
               </a:rPr>
-              <a:t> )</a:t>
+              <a:t> </a:t>
+            </a:r>
+            <a:r>
+              <a:rPr lang="en-US" sz="3733" b="1" dirty="0">
+                <a:solidFill>
+                  <a:srgbClr val="000066"/>
+                </a:solidFill>
+                <a:latin typeface="Microsoft JhengHei" panose="020B0604030504040204" pitchFamily="34" charset="-120"/>
+                <a:ea typeface="Microsoft JhengHei" panose="020B0604030504040204" pitchFamily="34" charset="-120"/>
+              </a:rPr>
+              <a:t>)</a:t>
             </a:r>
             <a:endParaRPr lang="vi-VN" sz="3733" b="1" dirty="0">
               <a:solidFill>
@@ -3444,7 +3437,7 @@
                 <a:latin typeface="Microsoft JhengHei" panose="020B0604030504040204" pitchFamily="34" charset="-120"/>
                 <a:ea typeface="Microsoft JhengHei" panose="020B0604030504040204" pitchFamily="34" charset="-120"/>
               </a:rPr>
-              <a:t>正</a:t>
+              <a:t>正歌</a:t>
             </a:r>
             <a:r>
               <a:rPr lang="en-US" sz="3733" b="1" dirty="0">
@@ -3603,7 +3596,7 @@
                 <a:latin typeface="Microsoft JhengHei" panose="020B0604030504040204" pitchFamily="34" charset="-120"/>
                 <a:ea typeface="Microsoft JhengHei" panose="020B0604030504040204" pitchFamily="34" charset="-120"/>
               </a:rPr>
-              <a:t>副</a:t>
+              <a:t>副歌</a:t>
             </a:r>
             <a:r>
               <a:rPr lang="en-US" sz="3733" b="1" dirty="0">
@@ -3711,13 +3704,6 @@
               </a:rPr>
               <a:t>一生要跟隨祢</a:t>
             </a:r>
-            <a:endParaRPr lang="zh-TW" altLang="en-US" sz="6400" b="1" dirty="0">
-              <a:solidFill>
-                <a:srgbClr val="000066"/>
-              </a:solidFill>
-              <a:latin typeface="微軟正黑體" pitchFamily="34" charset="-120"/>
-              <a:ea typeface="微軟正黑體" pitchFamily="34" charset="-120"/>
-            </a:endParaRPr>
           </a:p>
         </p:txBody>
       </p:sp>
@@ -3755,24 +3741,34 @@
               <a:t>( </a:t>
             </a:r>
             <a:r>
-              <a:rPr lang="zh-CN" altLang="en-US" sz="3733" b="1" dirty="0">
+              <a:rPr lang="zh-CN" altLang="en-US" sz="3733" b="1" dirty="0" smtClean="0">
                 <a:solidFill>
                   <a:srgbClr val="000066"/>
                 </a:solidFill>
                 <a:latin typeface="Microsoft JhengHei" panose="020B0604030504040204" pitchFamily="34" charset="-120"/>
                 <a:ea typeface="Microsoft JhengHei" panose="020B0604030504040204" pitchFamily="34" charset="-120"/>
               </a:rPr>
-              <a:t>副</a:t>
-            </a:r>
-            <a:r>
-              <a:rPr lang="en-US" sz="3733" b="1" dirty="0">
+              <a:t>副歌</a:t>
+            </a:r>
+            <a:r>
+              <a:rPr lang="en-US" sz="3733" b="1" dirty="0" smtClean="0">
                 <a:solidFill>
                   <a:srgbClr val="000066"/>
                 </a:solidFill>
                 <a:latin typeface="Microsoft JhengHei" panose="020B0604030504040204" pitchFamily="34" charset="-120"/>
                 <a:ea typeface="Microsoft JhengHei" panose="020B0604030504040204" pitchFamily="34" charset="-120"/>
               </a:rPr>
-              <a:t> )</a:t>
+              <a:t> </a:t>
+            </a:r>
+            <a:r>
+              <a:rPr lang="en-US" sz="3733" b="1" dirty="0">
+                <a:solidFill>
+                  <a:srgbClr val="000066"/>
+                </a:solidFill>
+                <a:latin typeface="Microsoft JhengHei" panose="020B0604030504040204" pitchFamily="34" charset="-120"/>
+                <a:ea typeface="Microsoft JhengHei" panose="020B0604030504040204" pitchFamily="34" charset="-120"/>
+              </a:rPr>
+              <a:t>)</a:t>
             </a:r>
             <a:endParaRPr lang="vi-VN" sz="3733" b="1" dirty="0">
               <a:solidFill>
